--- a/lectures/week-04/lecture-en.pptx
+++ b/lectures/week-04/lecture-en.pptx
@@ -15295,7 +15295,7 @@
                 </a:solidFill>
                 <a:latin typeface="Source Han Sans SC"/>
               </a:rPr>
-              <a:t>Theory ~90 min · Lab ~75 min · Quiz &amp; Summary 15 min</a:t>
+              <a:t>Theory ~90 min · Lab 80 min · Quiz &amp; Summary 10 min</a:t>
             </a:r>
           </a:p>
         </p:txBody>
@@ -18544,7 +18544,7 @@
                 </a:solidFill>
                 <a:latin typeface="Source Han Sans SC"/>
               </a:rPr>
-              <a:t>75 minutes: build an MLP with nn.Module, run two controlled experiments (with/without activation; different widths and depths), and write the results as one table.
+              <a:t>80 minutes: build an MLP with nn.Module, run two controlled experiments (with/without activation; different widths and depths), and write the results as one table.
 It is also the close of Module 1: problem sheet + data pipeline + model - all three due today.</a:t>
             </a:r>
           </a:p>
